--- a/PPT/Group01_DAA_Macro_Project.pptx
+++ b/PPT/Group01_DAA_Macro_Project.pptx
@@ -972,7 +972,7 @@
                 <a:ea typeface="Calibri" pitchFamily="34" charset="-122"/>
                 <a:cs typeface="Calibri" pitchFamily="34" charset="-120"/>
               </a:rPr>
-              <a:t>Unit V – Branch and Bound  |  Group 1  |  Your Name</a:t>
+              <a:t>Unit V – Branch and Bound  |  Group 1  |  24WH1A0515</a:t>
             </a:r>
             <a:endParaRPr lang="en-US" sz="1200" dirty="0"/>
           </a:p>
@@ -1242,7 +1242,7 @@
                 <a:ea typeface="Calibri" pitchFamily="34" charset="-122"/>
                 <a:cs typeface="Calibri" pitchFamily="34" charset="-120"/>
               </a:rPr>
-              <a:t>Repo: github.com/&lt;your-group-repo&gt;/Unit5_BranchAndBound</a:t>
+              <a:t>Repo: github.com/nadimpallinavya-varma/DAA-Macro-Project-Group01</a:t>
             </a:r>
             <a:endParaRPr lang="en-US" sz="1100" dirty="0"/>
           </a:p>
